--- a/public/videos/repositories/route-spot-navi/route-spot-navi-tech-preview.pptx
+++ b/public/videos/repositories/route-spot-navi/route-spot-navi-tech-preview.pptx
@@ -134,7 +134,7 @@
           <p:cNvPr id="2" name="タイトル 1">
             <a:extLst>
               <a:ext uri="{FF2B5EF4-FFF2-40B4-BE49-F238E27FC236}">
-                <a16:creationId xmlns:a16="http://schemas.microsoft.com/office/drawing/2014/main" id="{2341A830-94E4-A40C-CD0E-7CED0FB769CA}"/>
+                <a16:creationId xmlns:a16="http://schemas.microsoft.com/office/drawing/2014/main" id="{E4E6BF08-6364-E1FB-FAE6-134DE6AAAEC9}"/>
               </a:ext>
             </a:extLst>
           </p:cNvPr>
@@ -171,7 +171,7 @@
           <p:cNvPr id="3" name="字幕 2">
             <a:extLst>
               <a:ext uri="{FF2B5EF4-FFF2-40B4-BE49-F238E27FC236}">
-                <a16:creationId xmlns:a16="http://schemas.microsoft.com/office/drawing/2014/main" id="{2737FE81-45C6-EC99-CAF8-243D683B16B7}"/>
+                <a16:creationId xmlns:a16="http://schemas.microsoft.com/office/drawing/2014/main" id="{BF341326-83FD-6A52-A72D-8541C619119C}"/>
               </a:ext>
             </a:extLst>
           </p:cNvPr>
@@ -241,7 +241,7 @@
           <p:cNvPr id="4" name="日付プレースホルダー 3">
             <a:extLst>
               <a:ext uri="{FF2B5EF4-FFF2-40B4-BE49-F238E27FC236}">
-                <a16:creationId xmlns:a16="http://schemas.microsoft.com/office/drawing/2014/main" id="{6D39A587-663E-C169-3ECF-F0C509D28B27}"/>
+                <a16:creationId xmlns:a16="http://schemas.microsoft.com/office/drawing/2014/main" id="{DA983818-A894-9056-73B9-0A3CBD660843}"/>
               </a:ext>
             </a:extLst>
           </p:cNvPr>
@@ -257,7 +257,7 @@
           <a:bodyPr/>
           <a:lstStyle/>
           <a:p>
-            <a:fld id="{55655807-42A0-4555-A921-7260E45CCF23}" type="datetimeFigureOut">
+            <a:fld id="{407C12DC-476D-40FE-A1A7-D62A4B771F4F}" type="datetimeFigureOut">
               <a:rPr kumimoji="1" lang="ja-JP" altLang="en-US" smtClean="0"/>
               <a:t>2026/7/30</a:t>
             </a:fld>
@@ -270,7 +270,7 @@
           <p:cNvPr id="5" name="フッター プレースホルダー 4">
             <a:extLst>
               <a:ext uri="{FF2B5EF4-FFF2-40B4-BE49-F238E27FC236}">
-                <a16:creationId xmlns:a16="http://schemas.microsoft.com/office/drawing/2014/main" id="{9CE54D76-46B6-CC45-F1E7-4A6BC7C6FF6E}"/>
+                <a16:creationId xmlns:a16="http://schemas.microsoft.com/office/drawing/2014/main" id="{8F90BBC7-81A9-FF64-C3DB-9EF69A07B43F}"/>
               </a:ext>
             </a:extLst>
           </p:cNvPr>
@@ -295,7 +295,7 @@
           <p:cNvPr id="6" name="スライド番号プレースホルダー 5">
             <a:extLst>
               <a:ext uri="{FF2B5EF4-FFF2-40B4-BE49-F238E27FC236}">
-                <a16:creationId xmlns:a16="http://schemas.microsoft.com/office/drawing/2014/main" id="{DF087A61-18D2-D27B-B779-D8897D86FA81}"/>
+                <a16:creationId xmlns:a16="http://schemas.microsoft.com/office/drawing/2014/main" id="{F68B7612-BFFC-95E7-2A7A-446FA035A423}"/>
               </a:ext>
             </a:extLst>
           </p:cNvPr>
@@ -311,7 +311,7 @@
           <a:bodyPr/>
           <a:lstStyle/>
           <a:p>
-            <a:fld id="{492753DB-8922-45F0-B059-DACA10F86F5A}" type="slidenum">
+            <a:fld id="{BDEE4564-7634-4230-8FE8-9102E18F4A7A}" type="slidenum">
               <a:rPr kumimoji="1" lang="ja-JP" altLang="en-US" smtClean="0"/>
               <a:t>‹#›</a:t>
             </a:fld>
@@ -322,7 +322,7 @@
     </p:spTree>
     <p:extLst>
       <p:ext uri="{BB962C8B-B14F-4D97-AF65-F5344CB8AC3E}">
-        <p14:creationId xmlns:p14="http://schemas.microsoft.com/office/powerpoint/2010/main" val="3165170477"/>
+        <p14:creationId xmlns:p14="http://schemas.microsoft.com/office/powerpoint/2010/main" val="4263580314"/>
       </p:ext>
     </p:extLst>
   </p:cSld>
@@ -354,7 +354,7 @@
           <p:cNvPr id="2" name="タイトル 1">
             <a:extLst>
               <a:ext uri="{FF2B5EF4-FFF2-40B4-BE49-F238E27FC236}">
-                <a16:creationId xmlns:a16="http://schemas.microsoft.com/office/drawing/2014/main" id="{F5499ED5-A676-6FBF-6D5D-46A7B5A72502}"/>
+                <a16:creationId xmlns:a16="http://schemas.microsoft.com/office/drawing/2014/main" id="{79395531-3550-DE58-8558-9BD6C2E7103B}"/>
               </a:ext>
             </a:extLst>
           </p:cNvPr>
@@ -382,7 +382,7 @@
           <p:cNvPr id="3" name="縦書きテキスト プレースホルダー 2">
             <a:extLst>
               <a:ext uri="{FF2B5EF4-FFF2-40B4-BE49-F238E27FC236}">
-                <a16:creationId xmlns:a16="http://schemas.microsoft.com/office/drawing/2014/main" id="{9E6645C1-AE37-56C5-04FA-7BB202DD14F2}"/>
+                <a16:creationId xmlns:a16="http://schemas.microsoft.com/office/drawing/2014/main" id="{18026D18-115C-14F0-7459-9B672B9D9F82}"/>
               </a:ext>
             </a:extLst>
           </p:cNvPr>
@@ -471,7 +471,7 @@
           <p:cNvPr id="4" name="日付プレースホルダー 3">
             <a:extLst>
               <a:ext uri="{FF2B5EF4-FFF2-40B4-BE49-F238E27FC236}">
-                <a16:creationId xmlns:a16="http://schemas.microsoft.com/office/drawing/2014/main" id="{F3DEAAF1-A2FC-8EC8-860C-81500AFAD910}"/>
+                <a16:creationId xmlns:a16="http://schemas.microsoft.com/office/drawing/2014/main" id="{140A70E9-8A12-34C1-981C-F60040BC2E80}"/>
               </a:ext>
             </a:extLst>
           </p:cNvPr>
@@ -487,7 +487,7 @@
           <a:bodyPr/>
           <a:lstStyle/>
           <a:p>
-            <a:fld id="{55655807-42A0-4555-A921-7260E45CCF23}" type="datetimeFigureOut">
+            <a:fld id="{407C12DC-476D-40FE-A1A7-D62A4B771F4F}" type="datetimeFigureOut">
               <a:rPr kumimoji="1" lang="ja-JP" altLang="en-US" smtClean="0"/>
               <a:t>2026/7/30</a:t>
             </a:fld>
@@ -500,7 +500,7 @@
           <p:cNvPr id="5" name="フッター プレースホルダー 4">
             <a:extLst>
               <a:ext uri="{FF2B5EF4-FFF2-40B4-BE49-F238E27FC236}">
-                <a16:creationId xmlns:a16="http://schemas.microsoft.com/office/drawing/2014/main" id="{6FE48FA5-F080-04BB-432D-A1378ED81F37}"/>
+                <a16:creationId xmlns:a16="http://schemas.microsoft.com/office/drawing/2014/main" id="{DF464A4F-F7B4-75F0-D656-B0AFCE65B4F0}"/>
               </a:ext>
             </a:extLst>
           </p:cNvPr>
@@ -525,7 +525,7 @@
           <p:cNvPr id="6" name="スライド番号プレースホルダー 5">
             <a:extLst>
               <a:ext uri="{FF2B5EF4-FFF2-40B4-BE49-F238E27FC236}">
-                <a16:creationId xmlns:a16="http://schemas.microsoft.com/office/drawing/2014/main" id="{1528A521-E8D8-FAAB-F171-DAA096B7F3D2}"/>
+                <a16:creationId xmlns:a16="http://schemas.microsoft.com/office/drawing/2014/main" id="{BC2C2F46-8A78-12A0-FEC5-4F48C2631355}"/>
               </a:ext>
             </a:extLst>
           </p:cNvPr>
@@ -541,7 +541,7 @@
           <a:bodyPr/>
           <a:lstStyle/>
           <a:p>
-            <a:fld id="{492753DB-8922-45F0-B059-DACA10F86F5A}" type="slidenum">
+            <a:fld id="{BDEE4564-7634-4230-8FE8-9102E18F4A7A}" type="slidenum">
               <a:rPr kumimoji="1" lang="ja-JP" altLang="en-US" smtClean="0"/>
               <a:t>‹#›</a:t>
             </a:fld>
@@ -552,7 +552,7 @@
     </p:spTree>
     <p:extLst>
       <p:ext uri="{BB962C8B-B14F-4D97-AF65-F5344CB8AC3E}">
-        <p14:creationId xmlns:p14="http://schemas.microsoft.com/office/powerpoint/2010/main" val="1018556584"/>
+        <p14:creationId xmlns:p14="http://schemas.microsoft.com/office/powerpoint/2010/main" val="2279113259"/>
       </p:ext>
     </p:extLst>
   </p:cSld>
@@ -584,7 +584,7 @@
           <p:cNvPr id="2" name="縦書きタイトル 1">
             <a:extLst>
               <a:ext uri="{FF2B5EF4-FFF2-40B4-BE49-F238E27FC236}">
-                <a16:creationId xmlns:a16="http://schemas.microsoft.com/office/drawing/2014/main" id="{6AFC3AB3-88B7-12A4-79A0-C19A75941E75}"/>
+                <a16:creationId xmlns:a16="http://schemas.microsoft.com/office/drawing/2014/main" id="{1F9446FB-5271-3EC3-5A5F-B3B2D188E6E2}"/>
               </a:ext>
             </a:extLst>
           </p:cNvPr>
@@ -617,7 +617,7 @@
           <p:cNvPr id="3" name="縦書きテキスト プレースホルダー 2">
             <a:extLst>
               <a:ext uri="{FF2B5EF4-FFF2-40B4-BE49-F238E27FC236}">
-                <a16:creationId xmlns:a16="http://schemas.microsoft.com/office/drawing/2014/main" id="{9EA1BB8C-AE2A-C162-3D28-8301C1140434}"/>
+                <a16:creationId xmlns:a16="http://schemas.microsoft.com/office/drawing/2014/main" id="{F220F9B5-3D44-A595-AB62-6A7C7465B4E9}"/>
               </a:ext>
             </a:extLst>
           </p:cNvPr>
@@ -711,7 +711,7 @@
           <p:cNvPr id="4" name="日付プレースホルダー 3">
             <a:extLst>
               <a:ext uri="{FF2B5EF4-FFF2-40B4-BE49-F238E27FC236}">
-                <a16:creationId xmlns:a16="http://schemas.microsoft.com/office/drawing/2014/main" id="{3007DC44-771C-A634-5707-7B9579E1F64B}"/>
+                <a16:creationId xmlns:a16="http://schemas.microsoft.com/office/drawing/2014/main" id="{5E933A0B-5CD6-1005-D689-475D79877853}"/>
               </a:ext>
             </a:extLst>
           </p:cNvPr>
@@ -727,7 +727,7 @@
           <a:bodyPr/>
           <a:lstStyle/>
           <a:p>
-            <a:fld id="{55655807-42A0-4555-A921-7260E45CCF23}" type="datetimeFigureOut">
+            <a:fld id="{407C12DC-476D-40FE-A1A7-D62A4B771F4F}" type="datetimeFigureOut">
               <a:rPr kumimoji="1" lang="ja-JP" altLang="en-US" smtClean="0"/>
               <a:t>2026/7/30</a:t>
             </a:fld>
@@ -740,7 +740,7 @@
           <p:cNvPr id="5" name="フッター プレースホルダー 4">
             <a:extLst>
               <a:ext uri="{FF2B5EF4-FFF2-40B4-BE49-F238E27FC236}">
-                <a16:creationId xmlns:a16="http://schemas.microsoft.com/office/drawing/2014/main" id="{67823F7B-B497-4844-67A7-C78AE3FDFD7A}"/>
+                <a16:creationId xmlns:a16="http://schemas.microsoft.com/office/drawing/2014/main" id="{71827741-40EB-0D27-29F1-EF29A8D11678}"/>
               </a:ext>
             </a:extLst>
           </p:cNvPr>
@@ -765,7 +765,7 @@
           <p:cNvPr id="6" name="スライド番号プレースホルダー 5">
             <a:extLst>
               <a:ext uri="{FF2B5EF4-FFF2-40B4-BE49-F238E27FC236}">
-                <a16:creationId xmlns:a16="http://schemas.microsoft.com/office/drawing/2014/main" id="{145D439A-E711-D03D-5213-33AFC2409B2F}"/>
+                <a16:creationId xmlns:a16="http://schemas.microsoft.com/office/drawing/2014/main" id="{567314DC-9E7A-A3C3-1F35-62CD74E274FD}"/>
               </a:ext>
             </a:extLst>
           </p:cNvPr>
@@ -781,7 +781,7 @@
           <a:bodyPr/>
           <a:lstStyle/>
           <a:p>
-            <a:fld id="{492753DB-8922-45F0-B059-DACA10F86F5A}" type="slidenum">
+            <a:fld id="{BDEE4564-7634-4230-8FE8-9102E18F4A7A}" type="slidenum">
               <a:rPr kumimoji="1" lang="ja-JP" altLang="en-US" smtClean="0"/>
               <a:t>‹#›</a:t>
             </a:fld>
@@ -792,7 +792,7 @@
     </p:spTree>
     <p:extLst>
       <p:ext uri="{BB962C8B-B14F-4D97-AF65-F5344CB8AC3E}">
-        <p14:creationId xmlns:p14="http://schemas.microsoft.com/office/powerpoint/2010/main" val="2086223879"/>
+        <p14:creationId xmlns:p14="http://schemas.microsoft.com/office/powerpoint/2010/main" val="1098391323"/>
       </p:ext>
     </p:extLst>
   </p:cSld>
@@ -824,7 +824,7 @@
           <p:cNvPr id="2" name="タイトル 1">
             <a:extLst>
               <a:ext uri="{FF2B5EF4-FFF2-40B4-BE49-F238E27FC236}">
-                <a16:creationId xmlns:a16="http://schemas.microsoft.com/office/drawing/2014/main" id="{42B8A6A3-BA09-C7A9-E898-CCA85908859B}"/>
+                <a16:creationId xmlns:a16="http://schemas.microsoft.com/office/drawing/2014/main" id="{1290C13F-122C-FA88-96D4-3D79DFAEDE01}"/>
               </a:ext>
             </a:extLst>
           </p:cNvPr>
@@ -852,7 +852,7 @@
           <p:cNvPr id="3" name="コンテンツ プレースホルダー 2">
             <a:extLst>
               <a:ext uri="{FF2B5EF4-FFF2-40B4-BE49-F238E27FC236}">
-                <a16:creationId xmlns:a16="http://schemas.microsoft.com/office/drawing/2014/main" id="{A9C93217-4629-3723-DF46-18B7922714A5}"/>
+                <a16:creationId xmlns:a16="http://schemas.microsoft.com/office/drawing/2014/main" id="{F53931D9-2F92-E104-0717-93F16B97B60C}"/>
               </a:ext>
             </a:extLst>
           </p:cNvPr>
@@ -941,7 +941,7 @@
           <p:cNvPr id="4" name="日付プレースホルダー 3">
             <a:extLst>
               <a:ext uri="{FF2B5EF4-FFF2-40B4-BE49-F238E27FC236}">
-                <a16:creationId xmlns:a16="http://schemas.microsoft.com/office/drawing/2014/main" id="{B5EA860A-8C3E-E2B3-74CA-27471982494E}"/>
+                <a16:creationId xmlns:a16="http://schemas.microsoft.com/office/drawing/2014/main" id="{944691EF-0C1F-1944-711D-40A9CD9FC183}"/>
               </a:ext>
             </a:extLst>
           </p:cNvPr>
@@ -957,7 +957,7 @@
           <a:bodyPr/>
           <a:lstStyle/>
           <a:p>
-            <a:fld id="{55655807-42A0-4555-A921-7260E45CCF23}" type="datetimeFigureOut">
+            <a:fld id="{407C12DC-476D-40FE-A1A7-D62A4B771F4F}" type="datetimeFigureOut">
               <a:rPr kumimoji="1" lang="ja-JP" altLang="en-US" smtClean="0"/>
               <a:t>2026/7/30</a:t>
             </a:fld>
@@ -970,7 +970,7 @@
           <p:cNvPr id="5" name="フッター プレースホルダー 4">
             <a:extLst>
               <a:ext uri="{FF2B5EF4-FFF2-40B4-BE49-F238E27FC236}">
-                <a16:creationId xmlns:a16="http://schemas.microsoft.com/office/drawing/2014/main" id="{414CE36E-2B9F-BE36-4EBE-EA6CC8C63DA2}"/>
+                <a16:creationId xmlns:a16="http://schemas.microsoft.com/office/drawing/2014/main" id="{E3EEC89D-0440-E8A3-0803-A96EC3558423}"/>
               </a:ext>
             </a:extLst>
           </p:cNvPr>
@@ -995,7 +995,7 @@
           <p:cNvPr id="6" name="スライド番号プレースホルダー 5">
             <a:extLst>
               <a:ext uri="{FF2B5EF4-FFF2-40B4-BE49-F238E27FC236}">
-                <a16:creationId xmlns:a16="http://schemas.microsoft.com/office/drawing/2014/main" id="{D2F55B1D-D8E9-C1A5-F54B-D2E0B86FB10F}"/>
+                <a16:creationId xmlns:a16="http://schemas.microsoft.com/office/drawing/2014/main" id="{27CF7851-2AF7-4049-9992-BB6455A4F5C1}"/>
               </a:ext>
             </a:extLst>
           </p:cNvPr>
@@ -1011,7 +1011,7 @@
           <a:bodyPr/>
           <a:lstStyle/>
           <a:p>
-            <a:fld id="{492753DB-8922-45F0-B059-DACA10F86F5A}" type="slidenum">
+            <a:fld id="{BDEE4564-7634-4230-8FE8-9102E18F4A7A}" type="slidenum">
               <a:rPr kumimoji="1" lang="ja-JP" altLang="en-US" smtClean="0"/>
               <a:t>‹#›</a:t>
             </a:fld>
@@ -1022,7 +1022,7 @@
     </p:spTree>
     <p:extLst>
       <p:ext uri="{BB962C8B-B14F-4D97-AF65-F5344CB8AC3E}">
-        <p14:creationId xmlns:p14="http://schemas.microsoft.com/office/powerpoint/2010/main" val="1204125808"/>
+        <p14:creationId xmlns:p14="http://schemas.microsoft.com/office/powerpoint/2010/main" val="3364635097"/>
       </p:ext>
     </p:extLst>
   </p:cSld>
@@ -1054,7 +1054,7 @@
           <p:cNvPr id="2" name="タイトル 1">
             <a:extLst>
               <a:ext uri="{FF2B5EF4-FFF2-40B4-BE49-F238E27FC236}">
-                <a16:creationId xmlns:a16="http://schemas.microsoft.com/office/drawing/2014/main" id="{E5398CC8-7413-1F72-35C9-C8A2D445FFA2}"/>
+                <a16:creationId xmlns:a16="http://schemas.microsoft.com/office/drawing/2014/main" id="{EAB31D8A-B753-FB22-9B4D-631AB4B36A2B}"/>
               </a:ext>
             </a:extLst>
           </p:cNvPr>
@@ -1091,7 +1091,7 @@
           <p:cNvPr id="3" name="テキスト プレースホルダー 2">
             <a:extLst>
               <a:ext uri="{FF2B5EF4-FFF2-40B4-BE49-F238E27FC236}">
-                <a16:creationId xmlns:a16="http://schemas.microsoft.com/office/drawing/2014/main" id="{45B9FD7D-F899-B20F-2E4D-666DEE47934B}"/>
+                <a16:creationId xmlns:a16="http://schemas.microsoft.com/office/drawing/2014/main" id="{92B217C8-E7E6-C954-38F5-7FAB46D86AFF}"/>
               </a:ext>
             </a:extLst>
           </p:cNvPr>
@@ -1216,7 +1216,7 @@
           <p:cNvPr id="4" name="日付プレースホルダー 3">
             <a:extLst>
               <a:ext uri="{FF2B5EF4-FFF2-40B4-BE49-F238E27FC236}">
-                <a16:creationId xmlns:a16="http://schemas.microsoft.com/office/drawing/2014/main" id="{0ABC40D6-7272-782E-B07F-8C8057CD4910}"/>
+                <a16:creationId xmlns:a16="http://schemas.microsoft.com/office/drawing/2014/main" id="{35D71FA0-0ABA-DF93-1622-B564F08BCFFF}"/>
               </a:ext>
             </a:extLst>
           </p:cNvPr>
@@ -1232,7 +1232,7 @@
           <a:bodyPr/>
           <a:lstStyle/>
           <a:p>
-            <a:fld id="{55655807-42A0-4555-A921-7260E45CCF23}" type="datetimeFigureOut">
+            <a:fld id="{407C12DC-476D-40FE-A1A7-D62A4B771F4F}" type="datetimeFigureOut">
               <a:rPr kumimoji="1" lang="ja-JP" altLang="en-US" smtClean="0"/>
               <a:t>2026/7/30</a:t>
             </a:fld>
@@ -1245,7 +1245,7 @@
           <p:cNvPr id="5" name="フッター プレースホルダー 4">
             <a:extLst>
               <a:ext uri="{FF2B5EF4-FFF2-40B4-BE49-F238E27FC236}">
-                <a16:creationId xmlns:a16="http://schemas.microsoft.com/office/drawing/2014/main" id="{E1EE36C9-7FCC-C2F2-1B51-0E34787194D7}"/>
+                <a16:creationId xmlns:a16="http://schemas.microsoft.com/office/drawing/2014/main" id="{F9CF6326-FD7B-2080-A2D0-5590FE56B58C}"/>
               </a:ext>
             </a:extLst>
           </p:cNvPr>
@@ -1270,7 +1270,7 @@
           <p:cNvPr id="6" name="スライド番号プレースホルダー 5">
             <a:extLst>
               <a:ext uri="{FF2B5EF4-FFF2-40B4-BE49-F238E27FC236}">
-                <a16:creationId xmlns:a16="http://schemas.microsoft.com/office/drawing/2014/main" id="{2B6BA1D0-0B5F-D0CB-B0AF-EB37B019D73B}"/>
+                <a16:creationId xmlns:a16="http://schemas.microsoft.com/office/drawing/2014/main" id="{147800DE-CAEF-29FD-CA30-1C1225CB28AD}"/>
               </a:ext>
             </a:extLst>
           </p:cNvPr>
@@ -1286,7 +1286,7 @@
           <a:bodyPr/>
           <a:lstStyle/>
           <a:p>
-            <a:fld id="{492753DB-8922-45F0-B059-DACA10F86F5A}" type="slidenum">
+            <a:fld id="{BDEE4564-7634-4230-8FE8-9102E18F4A7A}" type="slidenum">
               <a:rPr kumimoji="1" lang="ja-JP" altLang="en-US" smtClean="0"/>
               <a:t>‹#›</a:t>
             </a:fld>
@@ -1297,7 +1297,7 @@
     </p:spTree>
     <p:extLst>
       <p:ext uri="{BB962C8B-B14F-4D97-AF65-F5344CB8AC3E}">
-        <p14:creationId xmlns:p14="http://schemas.microsoft.com/office/powerpoint/2010/main" val="3554389099"/>
+        <p14:creationId xmlns:p14="http://schemas.microsoft.com/office/powerpoint/2010/main" val="2388396179"/>
       </p:ext>
     </p:extLst>
   </p:cSld>
@@ -1329,7 +1329,7 @@
           <p:cNvPr id="2" name="タイトル 1">
             <a:extLst>
               <a:ext uri="{FF2B5EF4-FFF2-40B4-BE49-F238E27FC236}">
-                <a16:creationId xmlns:a16="http://schemas.microsoft.com/office/drawing/2014/main" id="{E7D174DF-5EF0-1E0E-2328-3F19BD20E6AA}"/>
+                <a16:creationId xmlns:a16="http://schemas.microsoft.com/office/drawing/2014/main" id="{160277DD-8BFE-DB6F-E872-20252DA3FB95}"/>
               </a:ext>
             </a:extLst>
           </p:cNvPr>
@@ -1357,7 +1357,7 @@
           <p:cNvPr id="3" name="コンテンツ プレースホルダー 2">
             <a:extLst>
               <a:ext uri="{FF2B5EF4-FFF2-40B4-BE49-F238E27FC236}">
-                <a16:creationId xmlns:a16="http://schemas.microsoft.com/office/drawing/2014/main" id="{EF28BF20-FFD5-1674-7932-F7CFEFA91148}"/>
+                <a16:creationId xmlns:a16="http://schemas.microsoft.com/office/drawing/2014/main" id="{AB475A91-7107-B6FC-6A14-B401F04DF888}"/>
               </a:ext>
             </a:extLst>
           </p:cNvPr>
@@ -1451,7 +1451,7 @@
           <p:cNvPr id="4" name="コンテンツ プレースホルダー 3">
             <a:extLst>
               <a:ext uri="{FF2B5EF4-FFF2-40B4-BE49-F238E27FC236}">
-                <a16:creationId xmlns:a16="http://schemas.microsoft.com/office/drawing/2014/main" id="{5B2BC9C4-5938-9891-696A-91BD8AB85C81}"/>
+                <a16:creationId xmlns:a16="http://schemas.microsoft.com/office/drawing/2014/main" id="{AB1FE832-0927-85C1-7CFA-8643513E31FD}"/>
               </a:ext>
             </a:extLst>
           </p:cNvPr>
@@ -1545,7 +1545,7 @@
           <p:cNvPr id="5" name="日付プレースホルダー 4">
             <a:extLst>
               <a:ext uri="{FF2B5EF4-FFF2-40B4-BE49-F238E27FC236}">
-                <a16:creationId xmlns:a16="http://schemas.microsoft.com/office/drawing/2014/main" id="{35C90FEA-AD8C-576A-3157-CE9E41900F75}"/>
+                <a16:creationId xmlns:a16="http://schemas.microsoft.com/office/drawing/2014/main" id="{4B8F6040-325A-5166-6E95-0A47BBF744F7}"/>
               </a:ext>
             </a:extLst>
           </p:cNvPr>
@@ -1561,7 +1561,7 @@
           <a:bodyPr/>
           <a:lstStyle/>
           <a:p>
-            <a:fld id="{55655807-42A0-4555-A921-7260E45CCF23}" type="datetimeFigureOut">
+            <a:fld id="{407C12DC-476D-40FE-A1A7-D62A4B771F4F}" type="datetimeFigureOut">
               <a:rPr kumimoji="1" lang="ja-JP" altLang="en-US" smtClean="0"/>
               <a:t>2026/7/30</a:t>
             </a:fld>
@@ -1574,7 +1574,7 @@
           <p:cNvPr id="6" name="フッター プレースホルダー 5">
             <a:extLst>
               <a:ext uri="{FF2B5EF4-FFF2-40B4-BE49-F238E27FC236}">
-                <a16:creationId xmlns:a16="http://schemas.microsoft.com/office/drawing/2014/main" id="{57FB7572-743E-3A7A-0C2F-BC19B4C71CC3}"/>
+                <a16:creationId xmlns:a16="http://schemas.microsoft.com/office/drawing/2014/main" id="{C95E722E-824A-8327-83A7-59C6F0270FF0}"/>
               </a:ext>
             </a:extLst>
           </p:cNvPr>
@@ -1599,7 +1599,7 @@
           <p:cNvPr id="7" name="スライド番号プレースホルダー 6">
             <a:extLst>
               <a:ext uri="{FF2B5EF4-FFF2-40B4-BE49-F238E27FC236}">
-                <a16:creationId xmlns:a16="http://schemas.microsoft.com/office/drawing/2014/main" id="{57A5C469-E343-6E3F-BA0C-7468AC564DF8}"/>
+                <a16:creationId xmlns:a16="http://schemas.microsoft.com/office/drawing/2014/main" id="{A1C0D7CD-A6B5-631F-4D1B-C32BD01C93DF}"/>
               </a:ext>
             </a:extLst>
           </p:cNvPr>
@@ -1615,7 +1615,7 @@
           <a:bodyPr/>
           <a:lstStyle/>
           <a:p>
-            <a:fld id="{492753DB-8922-45F0-B059-DACA10F86F5A}" type="slidenum">
+            <a:fld id="{BDEE4564-7634-4230-8FE8-9102E18F4A7A}" type="slidenum">
               <a:rPr kumimoji="1" lang="ja-JP" altLang="en-US" smtClean="0"/>
               <a:t>‹#›</a:t>
             </a:fld>
@@ -1626,7 +1626,7 @@
     </p:spTree>
     <p:extLst>
       <p:ext uri="{BB962C8B-B14F-4D97-AF65-F5344CB8AC3E}">
-        <p14:creationId xmlns:p14="http://schemas.microsoft.com/office/powerpoint/2010/main" val="3395000350"/>
+        <p14:creationId xmlns:p14="http://schemas.microsoft.com/office/powerpoint/2010/main" val="177997345"/>
       </p:ext>
     </p:extLst>
   </p:cSld>
@@ -1658,7 +1658,7 @@
           <p:cNvPr id="2" name="タイトル 1">
             <a:extLst>
               <a:ext uri="{FF2B5EF4-FFF2-40B4-BE49-F238E27FC236}">
-                <a16:creationId xmlns:a16="http://schemas.microsoft.com/office/drawing/2014/main" id="{CB170FF5-D308-03B5-79A5-303D41645218}"/>
+                <a16:creationId xmlns:a16="http://schemas.microsoft.com/office/drawing/2014/main" id="{CC19C5A3-EB36-E61A-3371-BDFBB5516FB3}"/>
               </a:ext>
             </a:extLst>
           </p:cNvPr>
@@ -1691,7 +1691,7 @@
           <p:cNvPr id="3" name="テキスト プレースホルダー 2">
             <a:extLst>
               <a:ext uri="{FF2B5EF4-FFF2-40B4-BE49-F238E27FC236}">
-                <a16:creationId xmlns:a16="http://schemas.microsoft.com/office/drawing/2014/main" id="{CD1E9408-2AB2-6C81-8A71-3983E48DDD8F}"/>
+                <a16:creationId xmlns:a16="http://schemas.microsoft.com/office/drawing/2014/main" id="{54E14CAC-0E5A-578D-2B98-E3210F34BDA1}"/>
               </a:ext>
             </a:extLst>
           </p:cNvPr>
@@ -1762,7 +1762,7 @@
           <p:cNvPr id="4" name="コンテンツ プレースホルダー 3">
             <a:extLst>
               <a:ext uri="{FF2B5EF4-FFF2-40B4-BE49-F238E27FC236}">
-                <a16:creationId xmlns:a16="http://schemas.microsoft.com/office/drawing/2014/main" id="{31B8DBCD-2911-9C23-C28A-93BA4191CF0E}"/>
+                <a16:creationId xmlns:a16="http://schemas.microsoft.com/office/drawing/2014/main" id="{78CE05DE-10C6-6B1C-5300-431E80A54FF0}"/>
               </a:ext>
             </a:extLst>
           </p:cNvPr>
@@ -1856,7 +1856,7 @@
           <p:cNvPr id="5" name="テキスト プレースホルダー 4">
             <a:extLst>
               <a:ext uri="{FF2B5EF4-FFF2-40B4-BE49-F238E27FC236}">
-                <a16:creationId xmlns:a16="http://schemas.microsoft.com/office/drawing/2014/main" id="{0680DF5B-BCCC-0D3E-229B-0A9C466FB436}"/>
+                <a16:creationId xmlns:a16="http://schemas.microsoft.com/office/drawing/2014/main" id="{5CF40A42-5A26-F29F-09E2-01D500A5A8B6}"/>
               </a:ext>
             </a:extLst>
           </p:cNvPr>
@@ -1927,7 +1927,7 @@
           <p:cNvPr id="6" name="コンテンツ プレースホルダー 5">
             <a:extLst>
               <a:ext uri="{FF2B5EF4-FFF2-40B4-BE49-F238E27FC236}">
-                <a16:creationId xmlns:a16="http://schemas.microsoft.com/office/drawing/2014/main" id="{39FEDFFD-7BA1-894C-6FEE-011A7BE9B309}"/>
+                <a16:creationId xmlns:a16="http://schemas.microsoft.com/office/drawing/2014/main" id="{E35EB87F-E8A7-85A6-0422-E93020683507}"/>
               </a:ext>
             </a:extLst>
           </p:cNvPr>
@@ -2021,7 +2021,7 @@
           <p:cNvPr id="7" name="日付プレースホルダー 6">
             <a:extLst>
               <a:ext uri="{FF2B5EF4-FFF2-40B4-BE49-F238E27FC236}">
-                <a16:creationId xmlns:a16="http://schemas.microsoft.com/office/drawing/2014/main" id="{45B23AB5-122D-DDE9-1897-F1A1DDA2825B}"/>
+                <a16:creationId xmlns:a16="http://schemas.microsoft.com/office/drawing/2014/main" id="{F7D85C97-4B36-3EC3-4D00-DD45287F2262}"/>
               </a:ext>
             </a:extLst>
           </p:cNvPr>
@@ -2037,7 +2037,7 @@
           <a:bodyPr/>
           <a:lstStyle/>
           <a:p>
-            <a:fld id="{55655807-42A0-4555-A921-7260E45CCF23}" type="datetimeFigureOut">
+            <a:fld id="{407C12DC-476D-40FE-A1A7-D62A4B771F4F}" type="datetimeFigureOut">
               <a:rPr kumimoji="1" lang="ja-JP" altLang="en-US" smtClean="0"/>
               <a:t>2026/7/30</a:t>
             </a:fld>
@@ -2050,7 +2050,7 @@
           <p:cNvPr id="8" name="フッター プレースホルダー 7">
             <a:extLst>
               <a:ext uri="{FF2B5EF4-FFF2-40B4-BE49-F238E27FC236}">
-                <a16:creationId xmlns:a16="http://schemas.microsoft.com/office/drawing/2014/main" id="{CC25B246-468F-8802-1C6C-3B8A3CA7D325}"/>
+                <a16:creationId xmlns:a16="http://schemas.microsoft.com/office/drawing/2014/main" id="{5E7F06E0-D761-D4EF-5004-218E2B04A551}"/>
               </a:ext>
             </a:extLst>
           </p:cNvPr>
@@ -2075,7 +2075,7 @@
           <p:cNvPr id="9" name="スライド番号プレースホルダー 8">
             <a:extLst>
               <a:ext uri="{FF2B5EF4-FFF2-40B4-BE49-F238E27FC236}">
-                <a16:creationId xmlns:a16="http://schemas.microsoft.com/office/drawing/2014/main" id="{C01715BC-A204-79D1-FC2C-31A574208120}"/>
+                <a16:creationId xmlns:a16="http://schemas.microsoft.com/office/drawing/2014/main" id="{B955E971-BCB9-B972-8ADB-295E3FB19AFC}"/>
               </a:ext>
             </a:extLst>
           </p:cNvPr>
@@ -2091,7 +2091,7 @@
           <a:bodyPr/>
           <a:lstStyle/>
           <a:p>
-            <a:fld id="{492753DB-8922-45F0-B059-DACA10F86F5A}" type="slidenum">
+            <a:fld id="{BDEE4564-7634-4230-8FE8-9102E18F4A7A}" type="slidenum">
               <a:rPr kumimoji="1" lang="ja-JP" altLang="en-US" smtClean="0"/>
               <a:t>‹#›</a:t>
             </a:fld>
@@ -2102,7 +2102,7 @@
     </p:spTree>
     <p:extLst>
       <p:ext uri="{BB962C8B-B14F-4D97-AF65-F5344CB8AC3E}">
-        <p14:creationId xmlns:p14="http://schemas.microsoft.com/office/powerpoint/2010/main" val="3885142712"/>
+        <p14:creationId xmlns:p14="http://schemas.microsoft.com/office/powerpoint/2010/main" val="733744939"/>
       </p:ext>
     </p:extLst>
   </p:cSld>
@@ -2134,7 +2134,7 @@
           <p:cNvPr id="2" name="タイトル 1">
             <a:extLst>
               <a:ext uri="{FF2B5EF4-FFF2-40B4-BE49-F238E27FC236}">
-                <a16:creationId xmlns:a16="http://schemas.microsoft.com/office/drawing/2014/main" id="{B8EE5DAD-1AFE-5FA3-9921-DEA85DA1471D}"/>
+                <a16:creationId xmlns:a16="http://schemas.microsoft.com/office/drawing/2014/main" id="{380729A3-183C-3F58-A4B4-B71E14B8C1DF}"/>
               </a:ext>
             </a:extLst>
           </p:cNvPr>
@@ -2162,7 +2162,7 @@
           <p:cNvPr id="3" name="日付プレースホルダー 2">
             <a:extLst>
               <a:ext uri="{FF2B5EF4-FFF2-40B4-BE49-F238E27FC236}">
-                <a16:creationId xmlns:a16="http://schemas.microsoft.com/office/drawing/2014/main" id="{4C37E000-4944-2F7B-B292-DD7A1D9627C6}"/>
+                <a16:creationId xmlns:a16="http://schemas.microsoft.com/office/drawing/2014/main" id="{43EC6BD2-BC25-DE8D-D6A0-E7FD7C74DE09}"/>
               </a:ext>
             </a:extLst>
           </p:cNvPr>
@@ -2178,7 +2178,7 @@
           <a:bodyPr/>
           <a:lstStyle/>
           <a:p>
-            <a:fld id="{55655807-42A0-4555-A921-7260E45CCF23}" type="datetimeFigureOut">
+            <a:fld id="{407C12DC-476D-40FE-A1A7-D62A4B771F4F}" type="datetimeFigureOut">
               <a:rPr kumimoji="1" lang="ja-JP" altLang="en-US" smtClean="0"/>
               <a:t>2026/7/30</a:t>
             </a:fld>
@@ -2191,7 +2191,7 @@
           <p:cNvPr id="4" name="フッター プレースホルダー 3">
             <a:extLst>
               <a:ext uri="{FF2B5EF4-FFF2-40B4-BE49-F238E27FC236}">
-                <a16:creationId xmlns:a16="http://schemas.microsoft.com/office/drawing/2014/main" id="{5E652B17-E933-1ED9-214B-212A3DBD7AFF}"/>
+                <a16:creationId xmlns:a16="http://schemas.microsoft.com/office/drawing/2014/main" id="{514BDB14-C2F6-C49C-357E-DF7C02477C30}"/>
               </a:ext>
             </a:extLst>
           </p:cNvPr>
@@ -2216,7 +2216,7 @@
           <p:cNvPr id="5" name="スライド番号プレースホルダー 4">
             <a:extLst>
               <a:ext uri="{FF2B5EF4-FFF2-40B4-BE49-F238E27FC236}">
-                <a16:creationId xmlns:a16="http://schemas.microsoft.com/office/drawing/2014/main" id="{6B77DC23-580D-7975-D611-CC805E2BB8D1}"/>
+                <a16:creationId xmlns:a16="http://schemas.microsoft.com/office/drawing/2014/main" id="{508947F1-1490-FD53-8B5A-B4FE7677F0AC}"/>
               </a:ext>
             </a:extLst>
           </p:cNvPr>
@@ -2232,7 +2232,7 @@
           <a:bodyPr/>
           <a:lstStyle/>
           <a:p>
-            <a:fld id="{492753DB-8922-45F0-B059-DACA10F86F5A}" type="slidenum">
+            <a:fld id="{BDEE4564-7634-4230-8FE8-9102E18F4A7A}" type="slidenum">
               <a:rPr kumimoji="1" lang="ja-JP" altLang="en-US" smtClean="0"/>
               <a:t>‹#›</a:t>
             </a:fld>
@@ -2243,7 +2243,7 @@
     </p:spTree>
     <p:extLst>
       <p:ext uri="{BB962C8B-B14F-4D97-AF65-F5344CB8AC3E}">
-        <p14:creationId xmlns:p14="http://schemas.microsoft.com/office/powerpoint/2010/main" val="3422840520"/>
+        <p14:creationId xmlns:p14="http://schemas.microsoft.com/office/powerpoint/2010/main" val="4193270387"/>
       </p:ext>
     </p:extLst>
   </p:cSld>
@@ -2275,7 +2275,7 @@
           <p:cNvPr id="2" name="日付プレースホルダー 1">
             <a:extLst>
               <a:ext uri="{FF2B5EF4-FFF2-40B4-BE49-F238E27FC236}">
-                <a16:creationId xmlns:a16="http://schemas.microsoft.com/office/drawing/2014/main" id="{15D46FFC-7894-A71D-C02D-8611158904D5}"/>
+                <a16:creationId xmlns:a16="http://schemas.microsoft.com/office/drawing/2014/main" id="{98842808-08EE-D5E9-80D6-4F61E7F1E7E7}"/>
               </a:ext>
             </a:extLst>
           </p:cNvPr>
@@ -2291,7 +2291,7 @@
           <a:bodyPr/>
           <a:lstStyle/>
           <a:p>
-            <a:fld id="{55655807-42A0-4555-A921-7260E45CCF23}" type="datetimeFigureOut">
+            <a:fld id="{407C12DC-476D-40FE-A1A7-D62A4B771F4F}" type="datetimeFigureOut">
               <a:rPr kumimoji="1" lang="ja-JP" altLang="en-US" smtClean="0"/>
               <a:t>2026/7/30</a:t>
             </a:fld>
@@ -2304,7 +2304,7 @@
           <p:cNvPr id="3" name="フッター プレースホルダー 2">
             <a:extLst>
               <a:ext uri="{FF2B5EF4-FFF2-40B4-BE49-F238E27FC236}">
-                <a16:creationId xmlns:a16="http://schemas.microsoft.com/office/drawing/2014/main" id="{C8627268-767F-B507-9C8E-EFB15813814D}"/>
+                <a16:creationId xmlns:a16="http://schemas.microsoft.com/office/drawing/2014/main" id="{670D96D6-E812-B9DF-BC72-9C4098B07328}"/>
               </a:ext>
             </a:extLst>
           </p:cNvPr>
@@ -2329,7 +2329,7 @@
           <p:cNvPr id="4" name="スライド番号プレースホルダー 3">
             <a:extLst>
               <a:ext uri="{FF2B5EF4-FFF2-40B4-BE49-F238E27FC236}">
-                <a16:creationId xmlns:a16="http://schemas.microsoft.com/office/drawing/2014/main" id="{A21903F8-8D1D-45EA-66FE-81FBB55FF2D2}"/>
+                <a16:creationId xmlns:a16="http://schemas.microsoft.com/office/drawing/2014/main" id="{8D9945D2-89E0-1DF9-2748-EBDE073A89F2}"/>
               </a:ext>
             </a:extLst>
           </p:cNvPr>
@@ -2345,7 +2345,7 @@
           <a:bodyPr/>
           <a:lstStyle/>
           <a:p>
-            <a:fld id="{492753DB-8922-45F0-B059-DACA10F86F5A}" type="slidenum">
+            <a:fld id="{BDEE4564-7634-4230-8FE8-9102E18F4A7A}" type="slidenum">
               <a:rPr kumimoji="1" lang="ja-JP" altLang="en-US" smtClean="0"/>
               <a:t>‹#›</a:t>
             </a:fld>
@@ -2356,7 +2356,7 @@
     </p:spTree>
     <p:extLst>
       <p:ext uri="{BB962C8B-B14F-4D97-AF65-F5344CB8AC3E}">
-        <p14:creationId xmlns:p14="http://schemas.microsoft.com/office/powerpoint/2010/main" val="2089737447"/>
+        <p14:creationId xmlns:p14="http://schemas.microsoft.com/office/powerpoint/2010/main" val="2297939191"/>
       </p:ext>
     </p:extLst>
   </p:cSld>
@@ -2388,7 +2388,7 @@
           <p:cNvPr id="2" name="タイトル 1">
             <a:extLst>
               <a:ext uri="{FF2B5EF4-FFF2-40B4-BE49-F238E27FC236}">
-                <a16:creationId xmlns:a16="http://schemas.microsoft.com/office/drawing/2014/main" id="{73D499B3-61C0-129C-3035-57F76B7B4412}"/>
+                <a16:creationId xmlns:a16="http://schemas.microsoft.com/office/drawing/2014/main" id="{1B6B05DC-E160-15F5-B758-4077A33D3E6D}"/>
               </a:ext>
             </a:extLst>
           </p:cNvPr>
@@ -2425,7 +2425,7 @@
           <p:cNvPr id="3" name="コンテンツ プレースホルダー 2">
             <a:extLst>
               <a:ext uri="{FF2B5EF4-FFF2-40B4-BE49-F238E27FC236}">
-                <a16:creationId xmlns:a16="http://schemas.microsoft.com/office/drawing/2014/main" id="{FF66A04D-76A1-04F7-E083-5A65A3787711}"/>
+                <a16:creationId xmlns:a16="http://schemas.microsoft.com/office/drawing/2014/main" id="{EF5811EE-8779-C4C8-BC7B-1B0B94AC643C}"/>
               </a:ext>
             </a:extLst>
           </p:cNvPr>
@@ -2547,7 +2547,7 @@
           <p:cNvPr id="4" name="テキスト プレースホルダー 3">
             <a:extLst>
               <a:ext uri="{FF2B5EF4-FFF2-40B4-BE49-F238E27FC236}">
-                <a16:creationId xmlns:a16="http://schemas.microsoft.com/office/drawing/2014/main" id="{5F2A7C4F-1008-A490-651C-BFF1D0805DC7}"/>
+                <a16:creationId xmlns:a16="http://schemas.microsoft.com/office/drawing/2014/main" id="{517917A7-6DE6-960B-91D0-00CEE270224E}"/>
               </a:ext>
             </a:extLst>
           </p:cNvPr>
@@ -2618,7 +2618,7 @@
           <p:cNvPr id="5" name="日付プレースホルダー 4">
             <a:extLst>
               <a:ext uri="{FF2B5EF4-FFF2-40B4-BE49-F238E27FC236}">
-                <a16:creationId xmlns:a16="http://schemas.microsoft.com/office/drawing/2014/main" id="{D35B36D9-B089-22AB-BF28-5384A54ED7DA}"/>
+                <a16:creationId xmlns:a16="http://schemas.microsoft.com/office/drawing/2014/main" id="{E28E4D5B-15CA-8601-9786-683A49767547}"/>
               </a:ext>
             </a:extLst>
           </p:cNvPr>
@@ -2634,7 +2634,7 @@
           <a:bodyPr/>
           <a:lstStyle/>
           <a:p>
-            <a:fld id="{55655807-42A0-4555-A921-7260E45CCF23}" type="datetimeFigureOut">
+            <a:fld id="{407C12DC-476D-40FE-A1A7-D62A4B771F4F}" type="datetimeFigureOut">
               <a:rPr kumimoji="1" lang="ja-JP" altLang="en-US" smtClean="0"/>
               <a:t>2026/7/30</a:t>
             </a:fld>
@@ -2647,7 +2647,7 @@
           <p:cNvPr id="6" name="フッター プレースホルダー 5">
             <a:extLst>
               <a:ext uri="{FF2B5EF4-FFF2-40B4-BE49-F238E27FC236}">
-                <a16:creationId xmlns:a16="http://schemas.microsoft.com/office/drawing/2014/main" id="{8004DD76-F6EB-4446-0C7A-23E1AD2A254A}"/>
+                <a16:creationId xmlns:a16="http://schemas.microsoft.com/office/drawing/2014/main" id="{2E7BD21B-B88C-E8DF-86C5-6AEC2FBE5EE2}"/>
               </a:ext>
             </a:extLst>
           </p:cNvPr>
@@ -2672,7 +2672,7 @@
           <p:cNvPr id="7" name="スライド番号プレースホルダー 6">
             <a:extLst>
               <a:ext uri="{FF2B5EF4-FFF2-40B4-BE49-F238E27FC236}">
-                <a16:creationId xmlns:a16="http://schemas.microsoft.com/office/drawing/2014/main" id="{63C79833-6D27-E74E-2D9F-30BA1F476DC0}"/>
+                <a16:creationId xmlns:a16="http://schemas.microsoft.com/office/drawing/2014/main" id="{5D89866D-E4AB-1A86-D25F-22C20C8F6D36}"/>
               </a:ext>
             </a:extLst>
           </p:cNvPr>
@@ -2688,7 +2688,7 @@
           <a:bodyPr/>
           <a:lstStyle/>
           <a:p>
-            <a:fld id="{492753DB-8922-45F0-B059-DACA10F86F5A}" type="slidenum">
+            <a:fld id="{BDEE4564-7634-4230-8FE8-9102E18F4A7A}" type="slidenum">
               <a:rPr kumimoji="1" lang="ja-JP" altLang="en-US" smtClean="0"/>
               <a:t>‹#›</a:t>
             </a:fld>
@@ -2699,7 +2699,7 @@
     </p:spTree>
     <p:extLst>
       <p:ext uri="{BB962C8B-B14F-4D97-AF65-F5344CB8AC3E}">
-        <p14:creationId xmlns:p14="http://schemas.microsoft.com/office/powerpoint/2010/main" val="1811688942"/>
+        <p14:creationId xmlns:p14="http://schemas.microsoft.com/office/powerpoint/2010/main" val="1184992038"/>
       </p:ext>
     </p:extLst>
   </p:cSld>
@@ -2731,7 +2731,7 @@
           <p:cNvPr id="2" name="タイトル 1">
             <a:extLst>
               <a:ext uri="{FF2B5EF4-FFF2-40B4-BE49-F238E27FC236}">
-                <a16:creationId xmlns:a16="http://schemas.microsoft.com/office/drawing/2014/main" id="{35AAA9CE-3FF0-A598-755A-B43B2249CE5E}"/>
+                <a16:creationId xmlns:a16="http://schemas.microsoft.com/office/drawing/2014/main" id="{3C30CC7E-6D9B-F361-DE8D-29F461B24505}"/>
               </a:ext>
             </a:extLst>
           </p:cNvPr>
@@ -2768,7 +2768,7 @@
           <p:cNvPr id="3" name="図プレースホルダー 2">
             <a:extLst>
               <a:ext uri="{FF2B5EF4-FFF2-40B4-BE49-F238E27FC236}">
-                <a16:creationId xmlns:a16="http://schemas.microsoft.com/office/drawing/2014/main" id="{0F52E109-BAD5-A85F-7BDA-799A2AEE5D51}"/>
+                <a16:creationId xmlns:a16="http://schemas.microsoft.com/office/drawing/2014/main" id="{E14DC70B-15F8-1969-4868-4E69558E7B51}"/>
               </a:ext>
             </a:extLst>
           </p:cNvPr>
@@ -2835,7 +2835,7 @@
           <p:cNvPr id="4" name="テキスト プレースホルダー 3">
             <a:extLst>
               <a:ext uri="{FF2B5EF4-FFF2-40B4-BE49-F238E27FC236}">
-                <a16:creationId xmlns:a16="http://schemas.microsoft.com/office/drawing/2014/main" id="{D3CB4DB0-1715-12CB-07DF-00CB43063627}"/>
+                <a16:creationId xmlns:a16="http://schemas.microsoft.com/office/drawing/2014/main" id="{088FDAD9-3FE5-9629-7E02-12AE355A6D1D}"/>
               </a:ext>
             </a:extLst>
           </p:cNvPr>
@@ -2906,7 +2906,7 @@
           <p:cNvPr id="5" name="日付プレースホルダー 4">
             <a:extLst>
               <a:ext uri="{FF2B5EF4-FFF2-40B4-BE49-F238E27FC236}">
-                <a16:creationId xmlns:a16="http://schemas.microsoft.com/office/drawing/2014/main" id="{826493BC-96DC-84C3-599C-5A8A524F3BCD}"/>
+                <a16:creationId xmlns:a16="http://schemas.microsoft.com/office/drawing/2014/main" id="{12CA6A20-7888-AFD5-FCA6-EF1BA6B76B1B}"/>
               </a:ext>
             </a:extLst>
           </p:cNvPr>
@@ -2922,7 +2922,7 @@
           <a:bodyPr/>
           <a:lstStyle/>
           <a:p>
-            <a:fld id="{55655807-42A0-4555-A921-7260E45CCF23}" type="datetimeFigureOut">
+            <a:fld id="{407C12DC-476D-40FE-A1A7-D62A4B771F4F}" type="datetimeFigureOut">
               <a:rPr kumimoji="1" lang="ja-JP" altLang="en-US" smtClean="0"/>
               <a:t>2026/7/30</a:t>
             </a:fld>
@@ -2935,7 +2935,7 @@
           <p:cNvPr id="6" name="フッター プレースホルダー 5">
             <a:extLst>
               <a:ext uri="{FF2B5EF4-FFF2-40B4-BE49-F238E27FC236}">
-                <a16:creationId xmlns:a16="http://schemas.microsoft.com/office/drawing/2014/main" id="{B98956CD-0379-DF24-F800-0520BD0FED9D}"/>
+                <a16:creationId xmlns:a16="http://schemas.microsoft.com/office/drawing/2014/main" id="{63F0E1B7-2982-AA25-A6E4-F224CC2332B0}"/>
               </a:ext>
             </a:extLst>
           </p:cNvPr>
@@ -2960,7 +2960,7 @@
           <p:cNvPr id="7" name="スライド番号プレースホルダー 6">
             <a:extLst>
               <a:ext uri="{FF2B5EF4-FFF2-40B4-BE49-F238E27FC236}">
-                <a16:creationId xmlns:a16="http://schemas.microsoft.com/office/drawing/2014/main" id="{95866A0C-8630-78B9-41A0-05756DB5489B}"/>
+                <a16:creationId xmlns:a16="http://schemas.microsoft.com/office/drawing/2014/main" id="{3EFD9DB7-664E-88DE-A9D1-16326FBE27BD}"/>
               </a:ext>
             </a:extLst>
           </p:cNvPr>
@@ -2976,7 +2976,7 @@
           <a:bodyPr/>
           <a:lstStyle/>
           <a:p>
-            <a:fld id="{492753DB-8922-45F0-B059-DACA10F86F5A}" type="slidenum">
+            <a:fld id="{BDEE4564-7634-4230-8FE8-9102E18F4A7A}" type="slidenum">
               <a:rPr kumimoji="1" lang="ja-JP" altLang="en-US" smtClean="0"/>
               <a:t>‹#›</a:t>
             </a:fld>
@@ -2987,7 +2987,7 @@
     </p:spTree>
     <p:extLst>
       <p:ext uri="{BB962C8B-B14F-4D97-AF65-F5344CB8AC3E}">
-        <p14:creationId xmlns:p14="http://schemas.microsoft.com/office/powerpoint/2010/main" val="646882397"/>
+        <p14:creationId xmlns:p14="http://schemas.microsoft.com/office/powerpoint/2010/main" val="448933415"/>
       </p:ext>
     </p:extLst>
   </p:cSld>
@@ -3024,7 +3024,7 @@
           <p:cNvPr id="2" name="タイトル プレースホルダー 1">
             <a:extLst>
               <a:ext uri="{FF2B5EF4-FFF2-40B4-BE49-F238E27FC236}">
-                <a16:creationId xmlns:a16="http://schemas.microsoft.com/office/drawing/2014/main" id="{6AF5BB09-63A4-238B-4204-AE89884AFCEC}"/>
+                <a16:creationId xmlns:a16="http://schemas.microsoft.com/office/drawing/2014/main" id="{A3AFAE7F-9A9F-C8F1-E1E9-54C179A15BED}"/>
               </a:ext>
             </a:extLst>
           </p:cNvPr>
@@ -3062,7 +3062,7 @@
           <p:cNvPr id="3" name="テキスト プレースホルダー 2">
             <a:extLst>
               <a:ext uri="{FF2B5EF4-FFF2-40B4-BE49-F238E27FC236}">
-                <a16:creationId xmlns:a16="http://schemas.microsoft.com/office/drawing/2014/main" id="{F0A1B3B8-DDFD-10E3-9147-E26C6D251CD1}"/>
+                <a16:creationId xmlns:a16="http://schemas.microsoft.com/office/drawing/2014/main" id="{20828C37-5BBB-BC3D-65FA-64E162EE2765}"/>
               </a:ext>
             </a:extLst>
           </p:cNvPr>
@@ -3161,7 +3161,7 @@
           <p:cNvPr id="4" name="日付プレースホルダー 3">
             <a:extLst>
               <a:ext uri="{FF2B5EF4-FFF2-40B4-BE49-F238E27FC236}">
-                <a16:creationId xmlns:a16="http://schemas.microsoft.com/office/drawing/2014/main" id="{1802A177-08CD-7BE1-AA93-4411514773D6}"/>
+                <a16:creationId xmlns:a16="http://schemas.microsoft.com/office/drawing/2014/main" id="{2DDAD61D-A9AD-4694-E96C-A6A05AA4A28D}"/>
               </a:ext>
             </a:extLst>
           </p:cNvPr>
@@ -3195,7 +3195,7 @@
             </a:lvl1pPr>
           </a:lstStyle>
           <a:p>
-            <a:fld id="{55655807-42A0-4555-A921-7260E45CCF23}" type="datetimeFigureOut">
+            <a:fld id="{407C12DC-476D-40FE-A1A7-D62A4B771F4F}" type="datetimeFigureOut">
               <a:rPr kumimoji="1" lang="ja-JP" altLang="en-US" smtClean="0"/>
               <a:t>2026/7/30</a:t>
             </a:fld>
@@ -3208,7 +3208,7 @@
           <p:cNvPr id="5" name="フッター プレースホルダー 4">
             <a:extLst>
               <a:ext uri="{FF2B5EF4-FFF2-40B4-BE49-F238E27FC236}">
-                <a16:creationId xmlns:a16="http://schemas.microsoft.com/office/drawing/2014/main" id="{DF80149F-37CD-8EEF-EECE-04FE01EF9FB5}"/>
+                <a16:creationId xmlns:a16="http://schemas.microsoft.com/office/drawing/2014/main" id="{E6AB80EC-41C1-D627-28D9-265825E9D596}"/>
               </a:ext>
             </a:extLst>
           </p:cNvPr>
@@ -3251,7 +3251,7 @@
           <p:cNvPr id="6" name="スライド番号プレースホルダー 5">
             <a:extLst>
               <a:ext uri="{FF2B5EF4-FFF2-40B4-BE49-F238E27FC236}">
-                <a16:creationId xmlns:a16="http://schemas.microsoft.com/office/drawing/2014/main" id="{0619B8E2-031E-1FAD-EFF8-958D8598B1E8}"/>
+                <a16:creationId xmlns:a16="http://schemas.microsoft.com/office/drawing/2014/main" id="{78A10033-15F9-BC89-76A6-8FFF77C05333}"/>
               </a:ext>
             </a:extLst>
           </p:cNvPr>
@@ -3285,7 +3285,7 @@
             </a:lvl1pPr>
           </a:lstStyle>
           <a:p>
-            <a:fld id="{492753DB-8922-45F0-B059-DACA10F86F5A}" type="slidenum">
+            <a:fld id="{BDEE4564-7634-4230-8FE8-9102E18F4A7A}" type="slidenum">
               <a:rPr kumimoji="1" lang="ja-JP" altLang="en-US" smtClean="0"/>
               <a:t>‹#›</a:t>
             </a:fld>
@@ -3296,7 +3296,7 @@
     </p:spTree>
     <p:extLst>
       <p:ext uri="{BB962C8B-B14F-4D97-AF65-F5344CB8AC3E}">
-        <p14:creationId xmlns:p14="http://schemas.microsoft.com/office/powerpoint/2010/main" val="699756615"/>
+        <p14:creationId xmlns:p14="http://schemas.microsoft.com/office/powerpoint/2010/main" val="233471290"/>
       </p:ext>
     </p:extLst>
   </p:cSld>
@@ -3619,7 +3619,7 @@
           <p:cNvPr id="2" name="テキスト ボックス 1">
             <a:extLst>
               <a:ext uri="{FF2B5EF4-FFF2-40B4-BE49-F238E27FC236}">
-                <a16:creationId xmlns:a16="http://schemas.microsoft.com/office/drawing/2014/main" id="{B10DE92D-B567-7C98-4F56-BF5B7495B94D}"/>
+                <a16:creationId xmlns:a16="http://schemas.microsoft.com/office/drawing/2014/main" id="{51FB777E-5771-5ADA-179B-582A6C8D422F}"/>
               </a:ext>
             </a:extLst>
           </p:cNvPr>
@@ -3665,7 +3665,7 @@
           <p:cNvPr id="3" name="テキスト ボックス 2">
             <a:extLst>
               <a:ext uri="{FF2B5EF4-FFF2-40B4-BE49-F238E27FC236}">
-                <a16:creationId xmlns:a16="http://schemas.microsoft.com/office/drawing/2014/main" id="{9E38123F-CB9B-C517-7160-300EA0BE3F3A}"/>
+                <a16:creationId xmlns:a16="http://schemas.microsoft.com/office/drawing/2014/main" id="{C3FDBA74-39A1-B16C-DAF7-DD45A26AB1A2}"/>
               </a:ext>
             </a:extLst>
           </p:cNvPr>
@@ -3714,7 +3714,7 @@
           <p:cNvPr id="4" name="テキスト ボックス 3">
             <a:extLst>
               <a:ext uri="{FF2B5EF4-FFF2-40B4-BE49-F238E27FC236}">
-                <a16:creationId xmlns:a16="http://schemas.microsoft.com/office/drawing/2014/main" id="{7DF0B68B-D7B8-5601-A99F-2D4CA3010456}"/>
+                <a16:creationId xmlns:a16="http://schemas.microsoft.com/office/drawing/2014/main" id="{B89CCF2A-B0F9-2471-64C3-B6179AC400F1}"/>
               </a:ext>
             </a:extLst>
           </p:cNvPr>
@@ -3754,7 +3754,7 @@
           <p:cNvPr id="5" name="テキスト ボックス 4">
             <a:extLst>
               <a:ext uri="{FF2B5EF4-FFF2-40B4-BE49-F238E27FC236}">
-                <a16:creationId xmlns:a16="http://schemas.microsoft.com/office/drawing/2014/main" id="{46D14D8E-335F-833C-1587-E396E1E4DBD4}"/>
+                <a16:creationId xmlns:a16="http://schemas.microsoft.com/office/drawing/2014/main" id="{E102333E-C87B-7836-C2EC-EA2EEECA70AC}"/>
               </a:ext>
             </a:extLst>
           </p:cNvPr>
@@ -3801,7 +3801,7 @@
             <a:hlinkClick r:id="" action="ppaction://media"/>
             <a:extLst>
               <a:ext uri="{FF2B5EF4-FFF2-40B4-BE49-F238E27FC236}">
-                <a16:creationId xmlns:a16="http://schemas.microsoft.com/office/drawing/2014/main" id="{858962F1-58FB-4DA2-4316-2F95F324D1E0}"/>
+                <a16:creationId xmlns:a16="http://schemas.microsoft.com/office/drawing/2014/main" id="{F733EAB0-57F0-D20E-D120-8956764997ED}"/>
               </a:ext>
             </a:extLst>
           </p:cNvPr>
@@ -3836,7 +3836,7 @@
     </p:spTree>
     <p:extLst>
       <p:ext uri="{BB962C8B-B14F-4D97-AF65-F5344CB8AC3E}">
-        <p14:creationId xmlns:p14="http://schemas.microsoft.com/office/powerpoint/2010/main" val="2795594511"/>
+        <p14:creationId xmlns:p14="http://schemas.microsoft.com/office/powerpoint/2010/main" val="624695098"/>
       </p:ext>
     </p:extLst>
   </p:cSld>
@@ -3960,7 +3960,7 @@
           <p:cNvPr id="2" name="テキスト ボックス 1">
             <a:extLst>
               <a:ext uri="{FF2B5EF4-FFF2-40B4-BE49-F238E27FC236}">
-                <a16:creationId xmlns:a16="http://schemas.microsoft.com/office/drawing/2014/main" id="{10731B4C-4ED4-1ABF-2ED0-63EC608CD149}"/>
+                <a16:creationId xmlns:a16="http://schemas.microsoft.com/office/drawing/2014/main" id="{E09714E8-9E58-5429-BFDB-58C9FAC4ACFB}"/>
               </a:ext>
             </a:extLst>
           </p:cNvPr>
@@ -4006,7 +4006,7 @@
           <p:cNvPr id="3" name="テキスト ボックス 2">
             <a:extLst>
               <a:ext uri="{FF2B5EF4-FFF2-40B4-BE49-F238E27FC236}">
-                <a16:creationId xmlns:a16="http://schemas.microsoft.com/office/drawing/2014/main" id="{022F0C71-5202-CA26-83ED-F09979DDB6A3}"/>
+                <a16:creationId xmlns:a16="http://schemas.microsoft.com/office/drawing/2014/main" id="{516F4A6F-E5DE-CD71-2E57-274958F6CD1C}"/>
               </a:ext>
             </a:extLst>
           </p:cNvPr>
@@ -4046,7 +4046,7 @@
           <p:cNvPr id="4" name="テキスト ボックス 3">
             <a:extLst>
               <a:ext uri="{FF2B5EF4-FFF2-40B4-BE49-F238E27FC236}">
-                <a16:creationId xmlns:a16="http://schemas.microsoft.com/office/drawing/2014/main" id="{1F629CC7-D094-B0FD-43C7-572841D39139}"/>
+                <a16:creationId xmlns:a16="http://schemas.microsoft.com/office/drawing/2014/main" id="{DFBC04DB-3F59-7ED3-AD74-36138E147335}"/>
               </a:ext>
             </a:extLst>
           </p:cNvPr>
@@ -4095,7 +4095,7 @@
           <p:cNvPr id="5" name="テキスト ボックス 4">
             <a:extLst>
               <a:ext uri="{FF2B5EF4-FFF2-40B4-BE49-F238E27FC236}">
-                <a16:creationId xmlns:a16="http://schemas.microsoft.com/office/drawing/2014/main" id="{3BCE9D70-EDE1-1DAE-9089-056F1C63FB8E}"/>
+                <a16:creationId xmlns:a16="http://schemas.microsoft.com/office/drawing/2014/main" id="{7DA38EE0-D020-374E-73A2-F435179BC20B}"/>
               </a:ext>
             </a:extLst>
           </p:cNvPr>
@@ -4142,7 +4142,7 @@
             <a:hlinkClick r:id="" action="ppaction://media"/>
             <a:extLst>
               <a:ext uri="{FF2B5EF4-FFF2-40B4-BE49-F238E27FC236}">
-                <a16:creationId xmlns:a16="http://schemas.microsoft.com/office/drawing/2014/main" id="{584C8B3D-65CF-F92F-C2AB-4A3CC4B132DA}"/>
+                <a16:creationId xmlns:a16="http://schemas.microsoft.com/office/drawing/2014/main" id="{F51A762C-775F-DAC0-3BB3-521576469B18}"/>
               </a:ext>
             </a:extLst>
           </p:cNvPr>
@@ -4177,7 +4177,7 @@
     </p:spTree>
     <p:extLst>
       <p:ext uri="{BB962C8B-B14F-4D97-AF65-F5344CB8AC3E}">
-        <p14:creationId xmlns:p14="http://schemas.microsoft.com/office/powerpoint/2010/main" val="3485699441"/>
+        <p14:creationId xmlns:p14="http://schemas.microsoft.com/office/powerpoint/2010/main" val="3153030003"/>
       </p:ext>
     </p:extLst>
   </p:cSld>
@@ -4301,7 +4301,7 @@
           <p:cNvPr id="2" name="テキスト ボックス 1">
             <a:extLst>
               <a:ext uri="{FF2B5EF4-FFF2-40B4-BE49-F238E27FC236}">
-                <a16:creationId xmlns:a16="http://schemas.microsoft.com/office/drawing/2014/main" id="{6BAE5D56-9549-C2EB-F7F2-2C7640CC58BD}"/>
+                <a16:creationId xmlns:a16="http://schemas.microsoft.com/office/drawing/2014/main" id="{3203FBBC-9BA2-D9CC-2014-048B4E326BA9}"/>
               </a:ext>
             </a:extLst>
           </p:cNvPr>
@@ -4347,7 +4347,7 @@
           <p:cNvPr id="3" name="テキスト ボックス 2">
             <a:extLst>
               <a:ext uri="{FF2B5EF4-FFF2-40B4-BE49-F238E27FC236}">
-                <a16:creationId xmlns:a16="http://schemas.microsoft.com/office/drawing/2014/main" id="{93E08B81-7C8F-37DA-E073-5263426A0946}"/>
+                <a16:creationId xmlns:a16="http://schemas.microsoft.com/office/drawing/2014/main" id="{D3EF93D4-2545-87ED-4D05-0898D3C98C85}"/>
               </a:ext>
             </a:extLst>
           </p:cNvPr>
@@ -4387,7 +4387,7 @@
           <p:cNvPr id="4" name="テキスト ボックス 3">
             <a:extLst>
               <a:ext uri="{FF2B5EF4-FFF2-40B4-BE49-F238E27FC236}">
-                <a16:creationId xmlns:a16="http://schemas.microsoft.com/office/drawing/2014/main" id="{437B9EBC-6E08-4C10-29BB-9A64F5A09FFC}"/>
+                <a16:creationId xmlns:a16="http://schemas.microsoft.com/office/drawing/2014/main" id="{BB8CAFBF-461A-14A5-6C83-A744172204FC}"/>
               </a:ext>
             </a:extLst>
           </p:cNvPr>
@@ -4482,7 +4482,7 @@
           <p:cNvPr id="5" name="テキスト ボックス 4">
             <a:extLst>
               <a:ext uri="{FF2B5EF4-FFF2-40B4-BE49-F238E27FC236}">
-                <a16:creationId xmlns:a16="http://schemas.microsoft.com/office/drawing/2014/main" id="{4988A448-4478-ECB1-1D78-07CC7909F003}"/>
+                <a16:creationId xmlns:a16="http://schemas.microsoft.com/office/drawing/2014/main" id="{8CA69E9C-13AD-B08C-38AC-F2E44B2719CE}"/>
               </a:ext>
             </a:extLst>
           </p:cNvPr>
@@ -4529,7 +4529,7 @@
             <a:hlinkClick r:id="" action="ppaction://media"/>
             <a:extLst>
               <a:ext uri="{FF2B5EF4-FFF2-40B4-BE49-F238E27FC236}">
-                <a16:creationId xmlns:a16="http://schemas.microsoft.com/office/drawing/2014/main" id="{73D553D4-5719-28CE-17E6-5DD6E4248319}"/>
+                <a16:creationId xmlns:a16="http://schemas.microsoft.com/office/drawing/2014/main" id="{23380C17-5C19-F94A-5EA8-103CE527C9A5}"/>
               </a:ext>
             </a:extLst>
           </p:cNvPr>
@@ -4564,7 +4564,7 @@
     </p:spTree>
     <p:extLst>
       <p:ext uri="{BB962C8B-B14F-4D97-AF65-F5344CB8AC3E}">
-        <p14:creationId xmlns:p14="http://schemas.microsoft.com/office/powerpoint/2010/main" val="4123337417"/>
+        <p14:creationId xmlns:p14="http://schemas.microsoft.com/office/powerpoint/2010/main" val="3886513338"/>
       </p:ext>
     </p:extLst>
   </p:cSld>
@@ -4688,7 +4688,7 @@
           <p:cNvPr id="2" name="テキスト ボックス 1">
             <a:extLst>
               <a:ext uri="{FF2B5EF4-FFF2-40B4-BE49-F238E27FC236}">
-                <a16:creationId xmlns:a16="http://schemas.microsoft.com/office/drawing/2014/main" id="{0B455454-6147-B66B-74CA-366EE84D2BB0}"/>
+                <a16:creationId xmlns:a16="http://schemas.microsoft.com/office/drawing/2014/main" id="{737D687D-B1A2-59B1-EB00-DBA5AFEC68E9}"/>
               </a:ext>
             </a:extLst>
           </p:cNvPr>
@@ -4734,7 +4734,7 @@
           <p:cNvPr id="3" name="テキスト ボックス 2">
             <a:extLst>
               <a:ext uri="{FF2B5EF4-FFF2-40B4-BE49-F238E27FC236}">
-                <a16:creationId xmlns:a16="http://schemas.microsoft.com/office/drawing/2014/main" id="{F88FF785-CDEE-0659-2BDA-2E67A9F58634}"/>
+                <a16:creationId xmlns:a16="http://schemas.microsoft.com/office/drawing/2014/main" id="{F2B17FD1-180E-9774-A81A-B91A736CEA96}"/>
               </a:ext>
             </a:extLst>
           </p:cNvPr>
@@ -4774,7 +4774,7 @@
           <p:cNvPr id="4" name="テキスト ボックス 3">
             <a:extLst>
               <a:ext uri="{FF2B5EF4-FFF2-40B4-BE49-F238E27FC236}">
-                <a16:creationId xmlns:a16="http://schemas.microsoft.com/office/drawing/2014/main" id="{AD7DC7A3-9012-AB3D-67AD-D15F5E0E4434}"/>
+                <a16:creationId xmlns:a16="http://schemas.microsoft.com/office/drawing/2014/main" id="{C4FDB033-DFE5-645B-3295-353DA5E74749}"/>
               </a:ext>
             </a:extLst>
           </p:cNvPr>
@@ -4884,7 +4884,7 @@
           <p:cNvPr id="5" name="テキスト ボックス 4">
             <a:extLst>
               <a:ext uri="{FF2B5EF4-FFF2-40B4-BE49-F238E27FC236}">
-                <a16:creationId xmlns:a16="http://schemas.microsoft.com/office/drawing/2014/main" id="{37F7372E-B271-1806-A20F-ADC85F576E86}"/>
+                <a16:creationId xmlns:a16="http://schemas.microsoft.com/office/drawing/2014/main" id="{AA0B0E0B-4F7A-B43C-7BC9-45F0B061B896}"/>
               </a:ext>
             </a:extLst>
           </p:cNvPr>
@@ -4931,7 +4931,7 @@
             <a:hlinkClick r:id="" action="ppaction://media"/>
             <a:extLst>
               <a:ext uri="{FF2B5EF4-FFF2-40B4-BE49-F238E27FC236}">
-                <a16:creationId xmlns:a16="http://schemas.microsoft.com/office/drawing/2014/main" id="{D5660CCD-2FA6-2C79-4758-3934CB4286A5}"/>
+                <a16:creationId xmlns:a16="http://schemas.microsoft.com/office/drawing/2014/main" id="{44AE2D80-EF91-244A-1AE5-0BD1B27DEB5C}"/>
               </a:ext>
             </a:extLst>
           </p:cNvPr>
@@ -4966,7 +4966,7 @@
     </p:spTree>
     <p:extLst>
       <p:ext uri="{BB962C8B-B14F-4D97-AF65-F5344CB8AC3E}">
-        <p14:creationId xmlns:p14="http://schemas.microsoft.com/office/powerpoint/2010/main" val="3926189207"/>
+        <p14:creationId xmlns:p14="http://schemas.microsoft.com/office/powerpoint/2010/main" val="2494987216"/>
       </p:ext>
     </p:extLst>
   </p:cSld>
@@ -5090,7 +5090,7 @@
           <p:cNvPr id="2" name="テキスト ボックス 1">
             <a:extLst>
               <a:ext uri="{FF2B5EF4-FFF2-40B4-BE49-F238E27FC236}">
-                <a16:creationId xmlns:a16="http://schemas.microsoft.com/office/drawing/2014/main" id="{D8AF8EF6-F8C9-A06A-89AD-8A44CE968D9A}"/>
+                <a16:creationId xmlns:a16="http://schemas.microsoft.com/office/drawing/2014/main" id="{FDED64B1-176C-4CA3-3BB9-95AFE9638E20}"/>
               </a:ext>
             </a:extLst>
           </p:cNvPr>
@@ -5136,7 +5136,7 @@
           <p:cNvPr id="3" name="テキスト ボックス 2">
             <a:extLst>
               <a:ext uri="{FF2B5EF4-FFF2-40B4-BE49-F238E27FC236}">
-                <a16:creationId xmlns:a16="http://schemas.microsoft.com/office/drawing/2014/main" id="{FE3F14C0-C134-BCA5-EACA-2BAF36FD9BF5}"/>
+                <a16:creationId xmlns:a16="http://schemas.microsoft.com/office/drawing/2014/main" id="{D03CC8D0-F6E5-CBA1-B8AE-B905F4E15F64}"/>
               </a:ext>
             </a:extLst>
           </p:cNvPr>
@@ -5176,7 +5176,7 @@
           <p:cNvPr id="4" name="テキスト ボックス 3">
             <a:extLst>
               <a:ext uri="{FF2B5EF4-FFF2-40B4-BE49-F238E27FC236}">
-                <a16:creationId xmlns:a16="http://schemas.microsoft.com/office/drawing/2014/main" id="{B35C5B76-63BC-2EC4-F360-DFF973D776A1}"/>
+                <a16:creationId xmlns:a16="http://schemas.microsoft.com/office/drawing/2014/main" id="{4F549601-4205-A03E-1402-9A19FAA3ADD2}"/>
               </a:ext>
             </a:extLst>
           </p:cNvPr>
@@ -5200,20 +5200,14 @@
           <a:lstStyle/>
           <a:p>
             <a:r>
-              <a:rPr kumimoji="1" lang="en-US" altLang="ja-JP" sz="2000">
+              <a:rPr kumimoji="1" lang="ja-JP" altLang="en-US" sz="2000">
                 <a:solidFill>
                   <a:srgbClr val="333333"/>
                 </a:solidFill>
                 <a:latin typeface="Arial" panose="020B0604020202020204" pitchFamily="34" charset="0"/>
               </a:rPr>
-              <a:t>Add SEO UGC and monetization strategy</a:t>
-            </a:r>
-            <a:endParaRPr kumimoji="1" lang="ja-JP" altLang="en-US" sz="2000">
-              <a:solidFill>
-                <a:srgbClr val="333333"/>
-              </a:solidFill>
-              <a:latin typeface="Arial" panose="020B0604020202020204" pitchFamily="34" charset="0"/>
-            </a:endParaRPr>
+              <a:t>直近のコミットでは、新機能の追加と実装強化が行われました。</a:t>
+            </a:r>
           </a:p>
         </p:txBody>
       </p:sp>
@@ -5222,7 +5216,7 @@
           <p:cNvPr id="5" name="テキスト ボックス 4">
             <a:extLst>
               <a:ext uri="{FF2B5EF4-FFF2-40B4-BE49-F238E27FC236}">
-                <a16:creationId xmlns:a16="http://schemas.microsoft.com/office/drawing/2014/main" id="{5079ADB2-1AB5-0E07-D5DD-386811A81874}"/>
+                <a16:creationId xmlns:a16="http://schemas.microsoft.com/office/drawing/2014/main" id="{0B374132-9D4C-F217-CE60-BC6D027B51EF}"/>
               </a:ext>
             </a:extLst>
           </p:cNvPr>
@@ -5269,7 +5263,7 @@
             <a:hlinkClick r:id="" action="ppaction://media"/>
             <a:extLst>
               <a:ext uri="{FF2B5EF4-FFF2-40B4-BE49-F238E27FC236}">
-                <a16:creationId xmlns:a16="http://schemas.microsoft.com/office/drawing/2014/main" id="{DAA69963-2E9A-00AE-5A84-C28087080B85}"/>
+                <a16:creationId xmlns:a16="http://schemas.microsoft.com/office/drawing/2014/main" id="{14D876FC-D6E2-1FDA-BF95-21B49338E559}"/>
               </a:ext>
             </a:extLst>
           </p:cNvPr>
@@ -5304,7 +5298,7 @@
     </p:spTree>
     <p:extLst>
       <p:ext uri="{BB962C8B-B14F-4D97-AF65-F5344CB8AC3E}">
-        <p14:creationId xmlns:p14="http://schemas.microsoft.com/office/powerpoint/2010/main" val="813628659"/>
+        <p14:creationId xmlns:p14="http://schemas.microsoft.com/office/powerpoint/2010/main" val="3314411721"/>
       </p:ext>
     </p:extLst>
   </p:cSld>
@@ -5313,10 +5307,10 @@
   </p:clrMapOvr>
   <mc:AlternateContent xmlns:mc="http://schemas.openxmlformats.org/markup-compatibility/2006">
     <mc:Choice xmlns:p14="http://schemas.microsoft.com/office/powerpoint/2010/main" Requires="p14">
-      <p:transition spd="slow" p14:dur="2000" advTm="9000"/>
+      <p:transition spd="slow" p14:dur="2000" advTm="6000"/>
     </mc:Choice>
     <mc:Fallback>
-      <p:transition spd="slow" advTm="9000"/>
+      <p:transition spd="slow" advTm="6000"/>
     </mc:Fallback>
   </mc:AlternateContent>
   <p:timing>
@@ -5347,7 +5341,7 @@
                                   <p:childTnLst>
                                     <p:cmd type="call" cmd="playFrom(0.0)">
                                       <p:cBhvr>
-                                        <p:cTn id="6" dur="8026" fill="hold"/>
+                                        <p:cTn id="6" dur="5687" fill="hold"/>
                                         <p:tgtEl>
                                           <p:spTgt spid="6"/>
                                         </p:tgtEl>
@@ -5428,7 +5422,7 @@
           <p:cNvPr id="2" name="テキスト ボックス 1">
             <a:extLst>
               <a:ext uri="{FF2B5EF4-FFF2-40B4-BE49-F238E27FC236}">
-                <a16:creationId xmlns:a16="http://schemas.microsoft.com/office/drawing/2014/main" id="{76E79B49-70A8-0B10-A782-15BA69CC156C}"/>
+                <a16:creationId xmlns:a16="http://schemas.microsoft.com/office/drawing/2014/main" id="{9724DAB1-B694-FE9D-28AB-6972D75C48CD}"/>
               </a:ext>
             </a:extLst>
           </p:cNvPr>
@@ -5474,7 +5468,7 @@
           <p:cNvPr id="3" name="テキスト ボックス 2">
             <a:extLst>
               <a:ext uri="{FF2B5EF4-FFF2-40B4-BE49-F238E27FC236}">
-                <a16:creationId xmlns:a16="http://schemas.microsoft.com/office/drawing/2014/main" id="{1D920102-EAB0-61D0-E7B2-10DDA2B76BB1}"/>
+                <a16:creationId xmlns:a16="http://schemas.microsoft.com/office/drawing/2014/main" id="{A1A9824A-D028-E6EE-A238-FAD9AE38E425}"/>
               </a:ext>
             </a:extLst>
           </p:cNvPr>
@@ -5514,7 +5508,7 @@
           <p:cNvPr id="4" name="テキスト ボックス 3">
             <a:extLst>
               <a:ext uri="{FF2B5EF4-FFF2-40B4-BE49-F238E27FC236}">
-                <a16:creationId xmlns:a16="http://schemas.microsoft.com/office/drawing/2014/main" id="{04461D83-EF35-CFCC-ECB9-E3A261B2C947}"/>
+                <a16:creationId xmlns:a16="http://schemas.microsoft.com/office/drawing/2014/main" id="{56F33066-703A-ED98-6575-D04FA8972DA1}"/>
               </a:ext>
             </a:extLst>
           </p:cNvPr>
@@ -5579,7 +5573,7 @@
           <p:cNvPr id="5" name="テキスト ボックス 4">
             <a:extLst>
               <a:ext uri="{FF2B5EF4-FFF2-40B4-BE49-F238E27FC236}">
-                <a16:creationId xmlns:a16="http://schemas.microsoft.com/office/drawing/2014/main" id="{1ABB4FB7-C7BC-169F-01B2-EA17C0A0D00E}"/>
+                <a16:creationId xmlns:a16="http://schemas.microsoft.com/office/drawing/2014/main" id="{EE0E6405-73BA-801C-C114-E03CAB5E6911}"/>
               </a:ext>
             </a:extLst>
           </p:cNvPr>
@@ -5626,7 +5620,7 @@
             <a:hlinkClick r:id="" action="ppaction://media"/>
             <a:extLst>
               <a:ext uri="{FF2B5EF4-FFF2-40B4-BE49-F238E27FC236}">
-                <a16:creationId xmlns:a16="http://schemas.microsoft.com/office/drawing/2014/main" id="{6D23458F-D300-BCF7-BE25-3DEEF493083B}"/>
+                <a16:creationId xmlns:a16="http://schemas.microsoft.com/office/drawing/2014/main" id="{214865DF-96AF-1915-AFC9-401F6AF0589B}"/>
               </a:ext>
             </a:extLst>
           </p:cNvPr>
@@ -5661,7 +5655,7 @@
     </p:spTree>
     <p:extLst>
       <p:ext uri="{BB962C8B-B14F-4D97-AF65-F5344CB8AC3E}">
-        <p14:creationId xmlns:p14="http://schemas.microsoft.com/office/powerpoint/2010/main" val="1169801140"/>
+        <p14:creationId xmlns:p14="http://schemas.microsoft.com/office/powerpoint/2010/main" val="2331683648"/>
       </p:ext>
     </p:extLst>
   </p:cSld>
